--- a/docs/prezentacija_SMS_spam.pptx
+++ b/docs/prezentacija_SMS_spam.pptx
@@ -164,7 +164,7 @@
         <p:txBody>
           <a:bodyPr/>
           <a:p>
-            <a:fld id="{F8932B54-1DD8-406B-A17F-F00387DA81B7}" type="slidenum">
+            <a:fld id="{3E66CEBC-68A4-4EA7-BFF8-AB6EF35AFA97}" type="slidenum">
               <a:t>&lt;#&gt;</a:t>
             </a:fld>
           </a:p>
@@ -247,7 +247,7 @@
         <p:txBody>
           <a:bodyPr/>
           <a:p>
-            <a:fld id="{064B8096-3DC4-4A15-87E2-9089CE4A4A4F}" type="slidenum">
+            <a:fld id="{35BD6685-337A-45B3-8130-C716F9B4E1B6}" type="slidenum">
               <a:t>&lt;#&gt;</a:t>
             </a:fld>
           </a:p>
@@ -330,7 +330,7 @@
         <p:txBody>
           <a:bodyPr/>
           <a:p>
-            <a:fld id="{007D7C1F-23A3-444E-BF24-DFEC7C67530E}" type="slidenum">
+            <a:fld id="{B0D6785F-D52D-48CD-9AD9-412C43C17692}" type="slidenum">
               <a:t>&lt;#&gt;</a:t>
             </a:fld>
           </a:p>
@@ -413,7 +413,7 @@
         <p:txBody>
           <a:bodyPr/>
           <a:p>
-            <a:fld id="{DA3FC273-B1F2-4978-8E7D-954A7C300948}" type="slidenum">
+            <a:fld id="{9797088B-70A3-4599-9BDB-59C0FDC855CD}" type="slidenum">
               <a:t>&lt;#&gt;</a:t>
             </a:fld>
           </a:p>
@@ -496,7 +496,7 @@
         <p:txBody>
           <a:bodyPr/>
           <a:p>
-            <a:fld id="{7AFE2579-191A-4D4C-85DD-B1C67E53F08A}" type="slidenum">
+            <a:fld id="{06EB3861-B2BE-49E6-A332-B279BA887959}" type="slidenum">
               <a:t>&lt;#&gt;</a:t>
             </a:fld>
           </a:p>
@@ -662,7 +662,7 @@
         <p:txBody>
           <a:bodyPr/>
           <a:p>
-            <a:fld id="{91CD6038-1507-41D2-A1F7-9DD359C593E2}" type="slidenum">
+            <a:fld id="{71B4D910-CD3B-4D85-9A63-C917F6F961B7}" type="slidenum">
               <a:t>&lt;#&gt;</a:t>
             </a:fld>
           </a:p>
@@ -745,7 +745,7 @@
         <p:txBody>
           <a:bodyPr/>
           <a:p>
-            <a:fld id="{972552A6-0FD8-416E-9BCB-EF94E9592A5C}" type="slidenum">
+            <a:fld id="{EF12F245-A5F8-403B-A73C-165CB9F6FDC4}" type="slidenum">
               <a:t>&lt;#&gt;</a:t>
             </a:fld>
           </a:p>
@@ -954,7 +954,7 @@
         <p:txBody>
           <a:bodyPr/>
           <a:p>
-            <a:fld id="{235B2C6B-11AB-4F2E-8C5E-C2B80B6CA03F}" type="slidenum">
+            <a:fld id="{C534A4F9-291B-4D85-9284-6A6485269350}" type="slidenum">
               <a:t>&lt;#&gt;</a:t>
             </a:fld>
           </a:p>
@@ -1037,7 +1037,7 @@
         <p:txBody>
           <a:bodyPr/>
           <a:p>
-            <a:fld id="{C264BCA9-96D7-4514-BED5-1472A8AAF165}" type="slidenum">
+            <a:fld id="{6C9183A7-2607-43A0-B2E7-B77300A1EDDB}" type="slidenum">
               <a:t>&lt;#&gt;</a:t>
             </a:fld>
           </a:p>
@@ -1160,7 +1160,7 @@
         <p:txBody>
           <a:bodyPr/>
           <a:p>
-            <a:fld id="{54759606-2477-4E24-BFDA-A05695AF0DF7}" type="slidenum">
+            <a:fld id="{F682A4E4-C2B3-47D6-8E17-0C0FBDD86EC9}" type="slidenum">
               <a:t>&lt;#&gt;</a:t>
             </a:fld>
           </a:p>
@@ -1243,7 +1243,7 @@
         <p:txBody>
           <a:bodyPr/>
           <a:p>
-            <a:fld id="{C156D149-AF21-42BC-8B66-25B65C9815C8}" type="slidenum">
+            <a:fld id="{FE6F2A2B-1A02-4915-84D4-DADB04BE5914}" type="slidenum">
               <a:t>&lt;#&gt;</a:t>
             </a:fld>
           </a:p>
@@ -1531,7 +1531,7 @@
               </a:lnSpc>
               <a:buNone/>
             </a:pPr>
-            <a:fld id="{85ED4296-CF6F-4D83-A125-D7B353388BC5}" type="slidenum">
+            <a:fld id="{4ED668E4-F349-43E4-A467-EA5036C41A69}" type="slidenum">
               <a:rPr b="0" lang="en-US" sz="1200" spc="-1" strike="noStrike">
                 <a:solidFill>
                   <a:schemeClr val="dk1">
@@ -2053,7 +2053,7 @@
               </a:lnSpc>
               <a:buNone/>
             </a:pPr>
-            <a:fld id="{8321B04E-C4AB-41D3-B112-61F86529D450}" type="slidenum">
+            <a:fld id="{F5FDB70C-DE56-4B95-8ED4-C0A64EFFBAFC}" type="slidenum">
               <a:rPr b="0" lang="en-US" sz="1200" spc="-1" strike="noStrike">
                 <a:solidFill>
                   <a:schemeClr val="dk1">
@@ -2621,7 +2621,7 @@
               </a:lnSpc>
               <a:buNone/>
             </a:pPr>
-            <a:fld id="{06A56A54-1C50-4775-9B8D-0D54360F57D3}" type="slidenum">
+            <a:fld id="{AF494A1B-D801-4921-A7BB-D6F475DD56A0}" type="slidenum">
               <a:rPr b="0" lang="en-US" sz="1200" spc="-1" strike="noStrike">
                 <a:solidFill>
                   <a:schemeClr val="dk1">
@@ -3085,7 +3085,7 @@
               </a:lnSpc>
               <a:buNone/>
             </a:pPr>
-            <a:fld id="{2F987FCA-E4F3-48BE-A634-96E9334020D8}" type="slidenum">
+            <a:fld id="{731A0A96-8241-40C3-9783-4CFF0F02066C}" type="slidenum">
               <a:rPr b="0" lang="en-US" sz="1200" spc="-1" strike="noStrike">
                 <a:solidFill>
                   <a:schemeClr val="dk1">
@@ -3549,7 +3549,7 @@
               </a:lnSpc>
               <a:buNone/>
             </a:pPr>
-            <a:fld id="{D913C5C8-9F9A-4590-A7BC-69A21469DE31}" type="slidenum">
+            <a:fld id="{4543B55F-637A-4CF8-8B85-4FE8B825CEFC}" type="slidenum">
               <a:rPr b="0" lang="en-US" sz="1200" spc="-1" strike="noStrike">
                 <a:solidFill>
                   <a:schemeClr val="dk1">
@@ -4013,7 +4013,7 @@
               </a:lnSpc>
               <a:buNone/>
             </a:pPr>
-            <a:fld id="{8D571180-6C6A-406D-ADBE-32F9060B6825}" type="slidenum">
+            <a:fld id="{5BB2ABD0-2FCF-4891-A22D-15BF3B14FCB2}" type="slidenum">
               <a:rPr b="0" lang="en-US" sz="1200" spc="-1" strike="noStrike">
                 <a:solidFill>
                   <a:schemeClr val="dk1">
@@ -4358,7 +4358,7 @@
               </a:lnSpc>
               <a:buNone/>
             </a:pPr>
-            <a:fld id="{2E429513-56EA-4F89-A4B0-CD7936A79F6D}" type="slidenum">
+            <a:fld id="{C0C84C82-7087-42AE-8F75-989E8EE2C780}" type="slidenum">
               <a:rPr b="0" lang="en-US" sz="1200" spc="-1" strike="noStrike">
                 <a:solidFill>
                   <a:schemeClr val="dk1">
@@ -5001,7 +5001,7 @@
               </a:lnSpc>
               <a:buNone/>
             </a:pPr>
-            <a:fld id="{9A829899-C23D-4B9B-B791-7466A1E86D69}" type="slidenum">
+            <a:fld id="{4D4A5D70-0271-485B-9107-E8596A5DC04B}" type="slidenum">
               <a:rPr b="0" lang="en-US" sz="1200" spc="-1" strike="noStrike">
                 <a:solidFill>
                   <a:schemeClr val="dk1">
@@ -5760,7 +5760,7 @@
               </a:lnSpc>
               <a:buNone/>
             </a:pPr>
-            <a:fld id="{1438D2EC-8D8D-4D95-8912-F0F6B96D3896}" type="slidenum">
+            <a:fld id="{CFDF8A0D-5B70-4B04-9CBF-01834E03E36B}" type="slidenum">
               <a:rPr b="0" lang="en-US" sz="1200" spc="-1" strike="noStrike">
                 <a:solidFill>
                   <a:schemeClr val="dk1">
@@ -6045,7 +6045,7 @@
               </a:lnSpc>
               <a:buNone/>
             </a:pPr>
-            <a:fld id="{9C3FDA77-3AA1-490F-93EC-01F6E6FD010A}" type="slidenum">
+            <a:fld id="{3856DFE3-A48B-456B-BA3F-4C89998501CE}" type="slidenum">
               <a:rPr b="0" lang="en-US" sz="1200" spc="-1" strike="noStrike">
                 <a:solidFill>
                   <a:schemeClr val="dk1">
@@ -6278,7 +6278,7 @@
               </a:lnSpc>
               <a:buNone/>
             </a:pPr>
-            <a:fld id="{376FBB61-1F34-471E-B910-3A216BF487D4}" type="slidenum">
+            <a:fld id="{09E66946-C668-432F-929F-A5451AD02D12}" type="slidenum">
               <a:rPr b="0" lang="en-US" sz="1200" spc="-1" strike="noStrike">
                 <a:solidFill>
                   <a:schemeClr val="dk1">
@@ -8895,7 +8895,7 @@
         <p:spPr>
           <a:xfrm>
             <a:off x="914400" y="2057400"/>
-            <a:ext cx="4937400" cy="303120"/>
+            <a:ext cx="4937400" cy="303840"/>
           </a:xfrm>
           <a:prstGeom prst="rect">
             <a:avLst/>
@@ -8928,7 +8928,7 @@
                 </a:solidFill>
                 <a:latin typeface="Calibri"/>
               </a:rPr>
-              <a:t>Koda in podatki: github.com/Asos75/SV1</a:t>
+              <a:t>Koda in podatki: github.com/jez-teh/SV1</a:t>
             </a:r>
             <a:endParaRPr b="0" lang="en-US" sz="1400" spc="-1" strike="noStrike">
               <a:solidFill>
@@ -12315,7 +12315,7 @@
                 </a:solidFill>
                 <a:latin typeface="Calibri"/>
               </a:rPr>
-              <a:t>Hiperparametri: LR = 2×10⁻⁵, 3 epohe, batch = 4 (8 pri few-shot)</a:t>
+              <a:t>Hiperparametri: Hitrost učenja = 2×10⁻⁵, 3 epohe, batch = 4 (8 pri few-shot)</a:t>
             </a:r>
             <a:endParaRPr b="0" lang="en-US" sz="1800" spc="-1" strike="noStrike">
               <a:solidFill>
